--- a/presentation/Rithvik Sharma - Research Presentation Final.pptx
+++ b/presentation/Rithvik Sharma - Research Presentation Final.pptx
@@ -125,7 +125,7 @@
   <pc:docChgLst>
     <pc:chgData name="Rithvik Sharma" userId="87ef432d2abbc2b7" providerId="LiveId" clId="{990F9B62-C2C4-4CA6-AACD-504428B55347}"/>
     <pc:docChg chg="undo custSel addSld delSld modSld">
-      <pc:chgData name="Rithvik Sharma" userId="87ef432d2abbc2b7" providerId="LiveId" clId="{990F9B62-C2C4-4CA6-AACD-504428B55347}" dt="2026-09-17T01:35:59.793" v="203" actId="20577"/>
+      <pc:chgData name="Rithvik Sharma" userId="87ef432d2abbc2b7" providerId="LiveId" clId="{990F9B62-C2C4-4CA6-AACD-504428B55347}" dt="2026-09-17T01:54:55.668" v="207" actId="22"/>
       <pc:docMkLst>
         <pc:docMk/>
       </pc:docMkLst>
@@ -211,6 +211,61 @@
             <ac:spMk id="11" creationId="{00000000-0000-0000-0000-000000000000}"/>
           </ac:spMkLst>
         </pc:spChg>
+      </pc:sldChg>
+      <pc:sldChg chg="addSp delSp mod">
+        <pc:chgData name="Rithvik Sharma" userId="87ef432d2abbc2b7" providerId="LiveId" clId="{990F9B62-C2C4-4CA6-AACD-504428B55347}" dt="2026-09-17T01:54:55.668" v="207" actId="22"/>
+        <pc:sldMkLst>
+          <pc:docMk/>
+          <pc:sldMk cId="0" sldId="265"/>
+        </pc:sldMkLst>
+        <pc:spChg chg="add">
+          <ac:chgData name="Rithvik Sharma" userId="87ef432d2abbc2b7" providerId="LiveId" clId="{990F9B62-C2C4-4CA6-AACD-504428B55347}" dt="2026-09-17T01:54:55.668" v="207" actId="22"/>
+          <ac:spMkLst>
+            <pc:docMk/>
+            <pc:sldMk cId="0" sldId="265"/>
+            <ac:spMk id="7" creationId="{E196B776-6A4A-ABA9-FEDC-908AC34AFD26}"/>
+          </ac:spMkLst>
+        </pc:spChg>
+        <pc:spChg chg="del">
+          <ac:chgData name="Rithvik Sharma" userId="87ef432d2abbc2b7" providerId="LiveId" clId="{990F9B62-C2C4-4CA6-AACD-504428B55347}" dt="2026-09-17T01:54:55.136" v="206" actId="478"/>
+          <ac:spMkLst>
+            <pc:docMk/>
+            <pc:sldMk cId="0" sldId="265"/>
+            <ac:spMk id="33" creationId="{00000000-0000-0000-0000-000000000000}"/>
+          </ac:spMkLst>
+        </pc:spChg>
+        <pc:picChg chg="del">
+          <ac:chgData name="Rithvik Sharma" userId="87ef432d2abbc2b7" providerId="LiveId" clId="{990F9B62-C2C4-4CA6-AACD-504428B55347}" dt="2026-09-17T01:54:53.019" v="205" actId="478"/>
+          <ac:picMkLst>
+            <pc:docMk/>
+            <pc:sldMk cId="0" sldId="265"/>
+            <ac:picMk id="8" creationId="{B5DF6608-52FB-DF13-B7AE-4F87FA531CAA}"/>
+          </ac:picMkLst>
+        </pc:picChg>
+        <pc:picChg chg="del">
+          <ac:chgData name="Rithvik Sharma" userId="87ef432d2abbc2b7" providerId="LiveId" clId="{990F9B62-C2C4-4CA6-AACD-504428B55347}" dt="2026-09-17T01:54:51.758" v="204" actId="478"/>
+          <ac:picMkLst>
+            <pc:docMk/>
+            <pc:sldMk cId="0" sldId="265"/>
+            <ac:picMk id="29" creationId="{322DE512-B840-FA2F-E938-3974B1B0F6F3}"/>
+          </ac:picMkLst>
+        </pc:picChg>
+        <pc:picChg chg="add">
+          <ac:chgData name="Rithvik Sharma" userId="87ef432d2abbc2b7" providerId="LiveId" clId="{990F9B62-C2C4-4CA6-AACD-504428B55347}" dt="2026-09-17T01:54:55.668" v="207" actId="22"/>
+          <ac:picMkLst>
+            <pc:docMk/>
+            <pc:sldMk cId="0" sldId="265"/>
+            <ac:picMk id="38" creationId="{432264DD-42E5-7726-1968-894275D8941F}"/>
+          </ac:picMkLst>
+        </pc:picChg>
+        <pc:picChg chg="add">
+          <ac:chgData name="Rithvik Sharma" userId="87ef432d2abbc2b7" providerId="LiveId" clId="{990F9B62-C2C4-4CA6-AACD-504428B55347}" dt="2026-09-17T01:54:55.668" v="207" actId="22"/>
+          <ac:picMkLst>
+            <pc:docMk/>
+            <pc:sldMk cId="0" sldId="265"/>
+            <ac:picMk id="40" creationId="{85252137-31AB-251B-0D10-08872EDBCF6A}"/>
+          </ac:picMkLst>
+        </pc:picChg>
       </pc:sldChg>
     </pc:docChg>
   </pc:docChgLst>
@@ -15448,59 +15503,6 @@
       </p:sp>
       <p:sp>
         <p:nvSpPr>
-          <p:cNvPr id="33" name="Text 31"/>
-          <p:cNvSpPr/>
-          <p:nvPr/>
-        </p:nvSpPr>
-        <p:spPr>
-          <a:xfrm>
-            <a:off x="12893509" y="6862533"/>
-            <a:ext cx="3076754" cy="374976"/>
-          </a:xfrm>
-          <a:prstGeom prst="rect">
-            <a:avLst/>
-          </a:prstGeom>
-          <a:noFill/>
-          <a:ln/>
-        </p:spPr>
-        <p:txBody>
-          <a:bodyPr wrap="square" lIns="25400" tIns="25400" rIns="25400" bIns="25400" rtlCol="0" anchor="t">
-            <a:noAutofit/>
-          </a:bodyPr>
-          <a:lstStyle/>
-          <a:p>
-            <a:pPr marL="0" indent="0" algn="l">
-              <a:buNone/>
-            </a:pPr>
-            <a:r>
-              <a:rPr lang="en-US" sz="2100" b="1" kern="0" spc="126" dirty="0">
-                <a:solidFill>
-                  <a:srgbClr val="FFFFFF"/>
-                </a:solidFill>
-                <a:latin typeface="Georgia" pitchFamily="34" charset="0"/>
-                <a:ea typeface="Georgia" pitchFamily="34" charset="-122"/>
-                <a:cs typeface="Georgia" pitchFamily="34" charset="-120"/>
-              </a:rPr>
-              <a:t>Scan for Web App! </a:t>
-            </a:r>
-          </a:p>
-          <a:p>
-            <a:pPr marL="0" indent="0" algn="l">
-              <a:buNone/>
-            </a:pPr>
-            <a:endParaRPr lang="en-US" sz="2100" b="1" kern="0" spc="126" dirty="0">
-              <a:solidFill>
-                <a:srgbClr val="FFFFFF"/>
-              </a:solidFill>
-              <a:latin typeface="Georgia" pitchFamily="34" charset="0"/>
-              <a:ea typeface="Georgia" pitchFamily="34" charset="-122"/>
-              <a:cs typeface="Georgia" pitchFamily="34" charset="-120"/>
-            </a:endParaRPr>
-          </a:p>
-        </p:txBody>
-      </p:sp>
-      <p:sp>
-        <p:nvSpPr>
           <p:cNvPr id="34" name="Shape 32"/>
           <p:cNvSpPr/>
           <p:nvPr/>
@@ -15608,12 +15610,45 @@
           </a:p>
         </p:txBody>
       </p:sp>
+      <p:sp>
+        <p:nvSpPr>
+          <p:cNvPr id="7" name="Shape 26">
+            <a:extLst>
+              <a:ext uri="{FF2B5EF4-FFF2-40B4-BE49-F238E27FC236}">
+                <a16:creationId xmlns:a16="http://schemas.microsoft.com/office/drawing/2014/main" id="{E196B776-6A4A-ABA9-FEDC-908AC34AFD26}"/>
+              </a:ext>
+            </a:extLst>
+          </p:cNvPr>
+          <p:cNvSpPr/>
+          <p:nvPr/>
+        </p:nvSpPr>
+        <p:spPr>
+          <a:xfrm>
+            <a:off x="10691589" y="1551608"/>
+            <a:ext cx="7024836" cy="7540005"/>
+          </a:xfrm>
+          <a:prstGeom prst="rect">
+            <a:avLst/>
+          </a:prstGeom>
+          <a:solidFill>
+            <a:srgbClr val="073763"/>
+          </a:solidFill>
+          <a:ln/>
+        </p:spPr>
+        <p:txBody>
+          <a:bodyPr/>
+          <a:lstStyle/>
+          <a:p>
+            <a:endParaRPr lang="en-US" dirty="0"/>
+          </a:p>
+        </p:txBody>
+      </p:sp>
       <p:pic>
         <p:nvPicPr>
-          <p:cNvPr id="29" name="Picture 28" descr="The image is a QR code with a blue background and a white QR code pattern.&#10;&#10;AI-generated content may be incorrect.">
+          <p:cNvPr id="38" name="Picture 37" descr="The image is a QR code with a dark blue background and a pattern of white dots.&#10;&#10;AI-generated content may be incorrect.">
             <a:extLst>
               <a:ext uri="{FF2B5EF4-FFF2-40B4-BE49-F238E27FC236}">
-                <a16:creationId xmlns:a16="http://schemas.microsoft.com/office/drawing/2014/main" id="{322DE512-B840-FA2F-E938-3974B1B0F6F3}"/>
+                <a16:creationId xmlns:a16="http://schemas.microsoft.com/office/drawing/2014/main" id="{432264DD-42E5-7726-1968-894275D8941F}"/>
               </a:ext>
             </a:extLst>
           </p:cNvPr>
@@ -15630,8 +15665,8 @@
         </p:blipFill>
         <p:spPr>
           <a:xfrm>
-            <a:off x="12035279" y="2239475"/>
-            <a:ext cx="4413508" cy="4413508"/>
+            <a:off x="12097480" y="2144364"/>
+            <a:ext cx="4213053" cy="4213053"/>
           </a:xfrm>
           <a:prstGeom prst="rect">
             <a:avLst/>
@@ -15640,10 +15675,10 @@
       </p:pic>
       <p:pic>
         <p:nvPicPr>
-          <p:cNvPr id="8" name="Picture 7" descr="The image shows a pair of black smartphones with their respective cases, and a directional arrow pointing downwards.&#10;&#10;AI-generated content may be incorrect.">
+          <p:cNvPr id="40" name="Picture 39" descr="The image is a simple, white, circular silhouette of a cat's face.&#10;&#10;AI-generated content may be incorrect.">
             <a:extLst>
               <a:ext uri="{FF2B5EF4-FFF2-40B4-BE49-F238E27FC236}">
-                <a16:creationId xmlns:a16="http://schemas.microsoft.com/office/drawing/2014/main" id="{B5DF6608-52FB-DF13-B7AE-4F87FA531CAA}"/>
+                <a16:creationId xmlns:a16="http://schemas.microsoft.com/office/drawing/2014/main" id="{85252137-31AB-251B-0D10-08872EDBCF6A}"/>
               </a:ext>
             </a:extLst>
           </p:cNvPr>
@@ -15653,17 +15688,15 @@
           <p:nvPr/>
         </p:nvPicPr>
         <p:blipFill>
-          <a:blip r:embed="rId4">
-            <a:lum bright="70000" contrast="-70000"/>
-          </a:blip>
+          <a:blip r:embed="rId4"/>
           <a:stretch>
             <a:fillRect/>
           </a:stretch>
         </p:blipFill>
         <p:spPr>
           <a:xfrm>
-            <a:off x="13362918" y="7183614"/>
-            <a:ext cx="2137936" cy="2137936"/>
+            <a:off x="12946625" y="6791159"/>
+            <a:ext cx="2590814" cy="1944233"/>
           </a:xfrm>
           <a:prstGeom prst="rect">
             <a:avLst/>
